--- a/slides_ko.pptx
+++ b/slides_ko.pptx
@@ -24891,7 +24891,7 @@
           </a:bodyPr>
           <a:p>
             <a:r>
-              <a:rPr lang="en-US" sz="2400" b="0" u="none" strike="noStrike">
+              <a:rPr lang="en-US" sz="2150" b="0" u="none" strike="noStrike">
                 <a:solidFill>
                   <a:srgbClr val="FFFFFF"/>
                 </a:solidFill>
@@ -24961,7 +24961,7 @@
           </a:bodyPr>
           <a:p>
             <a:r>
-              <a:rPr lang="en-US" sz="2400" b="0" u="none" strike="noStrike">
+              <a:rPr lang="en-US" sz="2150" b="0" u="none" strike="noStrike">
                 <a:solidFill>
                   <a:srgbClr val="FFFFFF"/>
                 </a:solidFill>
@@ -25647,7 +25647,7 @@
               </a:lnSpc>
             </a:pPr>
             <a:r>
-              <a:rPr lang="en-US" sz="2000" b="0" u="none" strike="noStrike">
+              <a:rPr lang="en-US" sz="1950" b="0" u="none" strike="noStrike">
                 <a:solidFill>
                   <a:srgbClr val="FFFFFF"/>
                 </a:solidFill>
@@ -25874,7 +25874,7 @@
               </a:lnSpc>
             </a:pPr>
             <a:r>
-              <a:rPr lang="en-US" sz="2000" b="0" u="none" strike="noStrike">
+              <a:rPr lang="en-US" sz="1950" b="0" u="none" strike="noStrike">
                 <a:solidFill>
                   <a:srgbClr val="FFFFFF"/>
                 </a:solidFill>
@@ -31764,7 +31764,7 @@
               </a:lnSpc>
             </a:pPr>
             <a:r>
-              <a:rPr lang="en-US" sz="5400" b="1" u="none" strike="noStrike">
+              <a:rPr lang="en-US" sz="4850" b="1" u="none" strike="noStrike">
                 <a:solidFill>
                   <a:srgbClr val="00FF41"/>
                 </a:solidFill>
@@ -31821,7 +31821,7 @@
               </a:lnSpc>
             </a:pPr>
             <a:r>
-              <a:rPr lang="en-US" sz="4200" b="0" u="none" strike="noStrike">
+              <a:rPr lang="en-US" sz="3950" b="0" u="none" strike="noStrike">
                 <a:solidFill>
                   <a:srgbClr val="FFFFFF"/>
                 </a:solidFill>
@@ -33271,7 +33271,7 @@
               </a:lnSpc>
             </a:pPr>
             <a:r>
-              <a:rPr lang="en-US" sz="7200" b="1" u="none" strike="noStrike">
+              <a:rPr lang="en-US" sz="6200" b="1" u="none" strike="noStrike">
                 <a:solidFill>
                   <a:srgbClr val="FF6B35"/>
                 </a:solidFill>
@@ -33328,7 +33328,7 @@
               </a:lnSpc>
             </a:pPr>
             <a:r>
-              <a:rPr lang="en-US" sz="2600" b="0" u="none" strike="noStrike">
+              <a:rPr lang="en-US" sz="2500" b="0" u="none" strike="noStrike">
                 <a:solidFill>
                   <a:srgbClr val="00D4FF"/>
                 </a:solidFill>
@@ -34150,7 +34150,7 @@
               </a:lnSpc>
             </a:pPr>
             <a:r>
-              <a:rPr lang="en-US" sz="5600" b="1" u="none" strike="noStrike">
+              <a:rPr lang="en-US" sz="4700" b="1" u="none" strike="noStrike">
                 <a:solidFill>
                   <a:srgbClr val="FFFFFF"/>
                 </a:solidFill>
@@ -34207,7 +34207,7 @@
               </a:lnSpc>
             </a:pPr>
             <a:r>
-              <a:rPr lang="en-US" sz="5600" b="1" u="none" strike="noStrike">
+              <a:rPr lang="en-US" sz="4700" b="1" u="none" strike="noStrike">
                 <a:solidFill>
                   <a:srgbClr val="FFFFFF"/>
                 </a:solidFill>
@@ -38099,7 +38099,7 @@
               </a:lnSpc>
             </a:pPr>
             <a:r>
-              <a:rPr lang="en-US" sz="4200" b="1" u="none" strike="noStrike">
+              <a:rPr lang="en-US" sz="3750" b="1" u="none" strike="noStrike">
                 <a:solidFill>
                   <a:srgbClr val="FF6B35"/>
                 </a:solidFill>
@@ -40788,7 +40788,7 @@
               </a:lnSpc>
             </a:pPr>
             <a:r>
-              <a:rPr lang="en-US" sz="3000" b="1" u="none" strike="noStrike">
+              <a:rPr lang="en-US" sz="2750" b="1" u="none" strike="noStrike">
                 <a:solidFill>
                   <a:srgbClr val="00D4FF"/>
                 </a:solidFill>
@@ -40799,7 +40799,7 @@
               <a:t>▶ </a:t>
             </a:r>
             <a:r>
-              <a:rPr lang="en-US" sz="3000" b="0" u="none" strike="noStrike">
+              <a:rPr lang="en-US" sz="2750" b="0" u="none" strike="noStrike">
                 <a:solidFill>
                   <a:srgbClr val="FFFFFF"/>
                 </a:solidFill>
@@ -40825,7 +40825,7 @@
               </a:lnSpc>
             </a:pPr>
             <a:r>
-              <a:rPr lang="en-US" sz="3000" b="1" u="none" strike="noStrike">
+              <a:rPr lang="en-US" sz="2750" b="1" u="none" strike="noStrike">
                 <a:solidFill>
                   <a:srgbClr val="00D4FF"/>
                 </a:solidFill>
@@ -40836,7 +40836,7 @@
               <a:t>▶ </a:t>
             </a:r>
             <a:r>
-              <a:rPr lang="en-US" sz="3000" b="0" u="none" strike="noStrike">
+              <a:rPr lang="en-US" sz="2750" b="0" u="none" strike="noStrike">
                 <a:solidFill>
                   <a:srgbClr val="FFFFFF"/>
                 </a:solidFill>
@@ -40862,7 +40862,7 @@
               </a:lnSpc>
             </a:pPr>
             <a:r>
-              <a:rPr lang="en-US" sz="3000" b="1" u="none" strike="noStrike">
+              <a:rPr lang="en-US" sz="2750" b="1" u="none" strike="noStrike">
                 <a:solidFill>
                   <a:srgbClr val="00D4FF"/>
                 </a:solidFill>
@@ -40873,7 +40873,7 @@
               <a:t>▶ </a:t>
             </a:r>
             <a:r>
-              <a:rPr lang="en-US" sz="3000" b="0" u="none" strike="noStrike">
+              <a:rPr lang="en-US" sz="2750" b="0" u="none" strike="noStrike">
                 <a:solidFill>
                   <a:srgbClr val="FFFFFF"/>
                 </a:solidFill>
@@ -40899,7 +40899,7 @@
               </a:lnSpc>
             </a:pPr>
             <a:r>
-              <a:rPr lang="en-US" sz="3000" b="1" u="none" strike="noStrike">
+              <a:rPr lang="en-US" sz="2750" b="1" u="none" strike="noStrike">
                 <a:solidFill>
                   <a:srgbClr val="00D4FF"/>
                 </a:solidFill>
@@ -40910,7 +40910,7 @@
               <a:t>▶ </a:t>
             </a:r>
             <a:r>
-              <a:rPr lang="en-US" sz="3000" b="0" u="none" strike="noStrike">
+              <a:rPr lang="en-US" sz="2750" b="0" u="none" strike="noStrike">
                 <a:solidFill>
                   <a:srgbClr val="FFFFFF"/>
                 </a:solidFill>
@@ -41231,7 +41231,7 @@
               </a:lnSpc>
             </a:pPr>
             <a:r>
-              <a:rPr lang="en-US" sz="2800" b="1" u="none" strike="noStrike">
+              <a:rPr lang="en-US" sz="2700" b="1" u="none" strike="noStrike">
                 <a:solidFill>
                   <a:srgbClr val="00D4FF"/>
                 </a:solidFill>
@@ -41242,7 +41242,7 @@
               <a:t>✓ </a:t>
             </a:r>
             <a:r>
-              <a:rPr lang="en-US" sz="2800" b="0" u="none" strike="noStrike">
+              <a:rPr lang="en-US" sz="2700" b="0" u="none" strike="noStrike">
                 <a:solidFill>
                   <a:srgbClr val="FFFFFF"/>
                 </a:solidFill>
@@ -41268,7 +41268,7 @@
               </a:lnSpc>
             </a:pPr>
             <a:r>
-              <a:rPr lang="en-US" sz="2800" b="1" u="none" strike="noStrike">
+              <a:rPr lang="en-US" sz="2700" b="1" u="none" strike="noStrike">
                 <a:solidFill>
                   <a:srgbClr val="00D4FF"/>
                 </a:solidFill>
@@ -41279,7 +41279,7 @@
               <a:t>✓ </a:t>
             </a:r>
             <a:r>
-              <a:rPr lang="en-US" sz="2800" b="0" u="none" strike="noStrike">
+              <a:rPr lang="en-US" sz="2700" b="0" u="none" strike="noStrike">
                 <a:solidFill>
                   <a:srgbClr val="FFFFFF"/>
                 </a:solidFill>
@@ -41305,7 +41305,7 @@
               </a:lnSpc>
             </a:pPr>
             <a:r>
-              <a:rPr lang="en-US" sz="2800" b="1" u="none" strike="noStrike">
+              <a:rPr lang="en-US" sz="2700" b="1" u="none" strike="noStrike">
                 <a:solidFill>
                   <a:srgbClr val="00D4FF"/>
                 </a:solidFill>
@@ -41316,7 +41316,7 @@
               <a:t>✓ </a:t>
             </a:r>
             <a:r>
-              <a:rPr lang="en-US" sz="2800" b="0" u="none" strike="noStrike">
+              <a:rPr lang="en-US" sz="2700" b="0" u="none" strike="noStrike">
                 <a:solidFill>
                   <a:srgbClr val="FFFFFF"/>
                 </a:solidFill>
@@ -41342,7 +41342,7 @@
               </a:lnSpc>
             </a:pPr>
             <a:r>
-              <a:rPr lang="en-US" sz="2800" b="1" u="none" strike="noStrike">
+              <a:rPr lang="en-US" sz="2700" b="1" u="none" strike="noStrike">
                 <a:solidFill>
                   <a:srgbClr val="00D4FF"/>
                 </a:solidFill>
@@ -41353,7 +41353,7 @@
               <a:t>✓ </a:t>
             </a:r>
             <a:r>
-              <a:rPr lang="en-US" sz="2800" b="0" u="none" strike="noStrike">
+              <a:rPr lang="en-US" sz="2700" b="0" u="none" strike="noStrike">
                 <a:solidFill>
                   <a:srgbClr val="FFFFFF"/>
                 </a:solidFill>
@@ -41379,7 +41379,7 @@
               </a:lnSpc>
             </a:pPr>
             <a:r>
-              <a:rPr lang="en-US" sz="2800" b="1" u="none" strike="noStrike">
+              <a:rPr lang="en-US" sz="2700" b="1" u="none" strike="noStrike">
                 <a:solidFill>
                   <a:srgbClr val="00D4FF"/>
                 </a:solidFill>
@@ -41390,7 +41390,7 @@
               <a:t>✓ </a:t>
             </a:r>
             <a:r>
-              <a:rPr lang="en-US" sz="2800" b="0" u="none" strike="noStrike">
+              <a:rPr lang="en-US" sz="2700" b="0" u="none" strike="noStrike">
                 <a:solidFill>
                   <a:srgbClr val="FFFFFF"/>
                 </a:solidFill>
@@ -42602,7 +42602,7 @@
               </a:lnSpc>
             </a:pPr>
             <a:r>
-              <a:rPr lang="en-US" sz="2600" b="1" u="none" strike="noStrike">
+              <a:rPr lang="en-US" sz="2550" b="1" u="none" strike="noStrike">
                 <a:solidFill>
                   <a:srgbClr val="FFFFFF"/>
                 </a:solidFill>
@@ -43778,7 +43778,7 @@
               </a:lnSpc>
             </a:pPr>
             <a:r>
-              <a:rPr lang="en-US" sz="2800" b="1" u="none" strike="noStrike">
+              <a:rPr lang="en-US" sz="2500" b="1" u="none" strike="noStrike">
                 <a:solidFill>
                   <a:srgbClr val="CCCCD6"/>
                 </a:solidFill>
@@ -47978,7 +47978,7 @@
               </a:lnSpc>
             </a:pPr>
             <a:r>
-              <a:rPr lang="en-US" sz="4200" b="1" u="none" strike="noStrike">
+              <a:rPr lang="en-US" sz="3900" b="1" u="none" strike="noStrike">
                 <a:solidFill>
                   <a:srgbClr val="00FF41"/>
                 </a:solidFill>
@@ -48319,7 +48319,7 @@
               </a:lnSpc>
             </a:pPr>
             <a:r>
-              <a:rPr lang="en-US" sz="2200" b="1" u="none" strike="noStrike">
+              <a:rPr lang="en-US" sz="1950" b="1" u="none" strike="noStrike">
                 <a:solidFill>
                   <a:srgbClr val="00D4FF"/>
                 </a:solidFill>
